--- a/lecons/LSA/Meteorology/08_LSA_MET_L08_Vertical_Distribution_of_Temperature.pptx
+++ b/lecons/LSA/Meteorology/08_LSA_MET_L08_Vertical_Distribution_of_Temperature.pptx
@@ -3109,7 +3109,7 @@
           <a:p>
             <a:r>
               <a:rPr lang="en-US" dirty="0"/>
-              <a:t>Let us copy the definitions. The key terms of this lesson are defined as follows. On this slide we have Environmental lapse rate (ELR) and Terrestrial radiation. Write each point on a new line, with the key term first, and explain it in your own words when we revise. When you finish, we go to the next slide.</a:t>
+              <a:t>Let us copy the definitions. The key terms of this lesson are defined as follows. On this slide we have Environmental lapse rate (ELR). Write each point on a new line, with the key term first, and explain it in your own words when we revise. When you finish, we go to the next slide.</a:t>
             </a:r>
             <a:endParaRPr lang="en-US" dirty="0"/>
           </a:p>
@@ -3197,7 +3197,7 @@
           <a:p>
             <a:r>
               <a:rPr lang="en-US" dirty="0"/>
-              <a:t>We continue with the definitions. On this slide we have Air density. Write each point on a new line, with the key term first, and explain it in your own words when we revise.</a:t>
+              <a:t>We continue with the definitions. On this slide we have Adiabatic change and Terrestrial radiation. Write each point on a new line, with the key term first, and explain it in your own words when we revise.</a:t>
             </a:r>
             <a:endParaRPr lang="en-US" dirty="0"/>
           </a:p>
@@ -3285,7 +3285,7 @@
           <a:p>
             <a:r>
               <a:rPr lang="en-US" dirty="0"/>
-              <a:t>Let us copy The Vertical Variation of Temperature. Temperature varies with height as follows. Copy the point on General rule on the left, then draw the diagram on the right: temperature and height. Give it a title and label it clearly.</a:t>
+              <a:t>Let us copy Nature of the Variation of Temperature with Height. Temperature varies with height in the following way. Copy the point on General rule on the left, then draw the diagram on the right: the fall of temperature with height. Give it a title and label it clearly.</a:t>
             </a:r>
             <a:endParaRPr lang="en-US" dirty="0"/>
           </a:p>
@@ -3373,7 +3373,7 @@
           <a:p>
             <a:r>
               <a:rPr lang="en-US" dirty="0"/>
-              <a:t>We continue with The Vertical Variation of Temperature. On this slide we have Average rate and Worked example. Write each point on a new line, with the key term first, and explain it in your own words when we revise.</a:t>
+              <a:t>We continue with Nature of the Variation of Temperature with Height. Copy the point on Worked example: write the key term first, then its explanation.</a:t>
             </a:r>
             <a:endParaRPr lang="en-US" dirty="0"/>
           </a:p>
@@ -3637,7 +3637,7 @@
           <a:p>
             <a:r>
               <a:rPr lang="en-US" dirty="0"/>
-              <a:t>Let us copy Reasons for the Fall of Temperature with Height. Temperature falls with height for the following reasons. Copy the point on Heating from below on the left, then draw the diagram on the right: heating from below. Give it a title and label it clearly.</a:t>
+              <a:t>Let us copy Reasons for the Vertical Lapsing of Temperature. Temperature falls with height for the following reasons. Copy the point on Heating from below on the left, then draw the diagram on the right: the air heated from below. Give it a title and label it clearly.</a:t>
             </a:r>
             <a:endParaRPr lang="en-US" dirty="0"/>
           </a:p>
@@ -3725,7 +3725,7 @@
           <a:p>
             <a:r>
               <a:rPr lang="en-US" dirty="0"/>
-              <a:t>Copy the point on Denser air below on the left, then draw the diagram on the right: why temperature falls with height. Give it a title and label it clearly.</a:t>
+              <a:t>Copy the point on Denser air near the ground on the left, then draw the diagram on the right: density and temperature. Give it a title and label it clearly.</a:t>
             </a:r>
             <a:endParaRPr lang="en-US" dirty="0"/>
           </a:p>
@@ -3813,7 +3813,7 @@
           <a:p>
             <a:r>
               <a:rPr lang="en-US" dirty="0"/>
-              <a:t>We continue with Reasons for the Fall of Temperature with Height. On this slide we have Thin air above. Write each point on a new line, with the key term first, and explain it in your own words when we revise.</a:t>
+              <a:t>We continue with Reasons for the Vertical Lapsing of Temperature. Copy the point on Thin air at high altitudes: write the key term first, then its explanation.</a:t>
             </a:r>
             <a:endParaRPr lang="en-US" dirty="0"/>
           </a:p>
@@ -3901,7 +3901,7 @@
           <a:p>
             <a:r>
               <a:rPr lang="en-US" dirty="0"/>
-              <a:t>Copy the point on Pressure and expansion on the left, then draw the diagram on the right: rising air cools. Give it a title and label it clearly.</a:t>
+              <a:t>Copy the point on Adiabatic cooling on the left, then draw the diagram on the right: a rising parcel of air. Give it a title and label it clearly.</a:t>
             </a:r>
             <a:endParaRPr lang="en-US" dirty="0"/>
           </a:p>
@@ -14130,7 +14130,7 @@
         <p:spPr>
           <a:xfrm>
             <a:off x="0" y="658368"/>
-            <a:ext cx="1463040" cy="5833872"/>
+            <a:ext cx="5120640" cy="5833872"/>
           </a:xfrm>
           <a:prstGeom prst="rect">
             <a:avLst/>
@@ -14145,8 +14145,8 @@
         </p:nvSpPr>
         <p:spPr>
           <a:xfrm>
-            <a:off x="1691640" y="1005840"/>
-            <a:ext cx="10180015" cy="731520"/>
+            <a:off x="5349240" y="1005840"/>
+            <a:ext cx="6522415" cy="731520"/>
           </a:xfrm>
           <a:prstGeom prst="rect">
             <a:avLst/>
@@ -14186,8 +14186,8 @@
         </p:nvSpPr>
         <p:spPr>
           <a:xfrm>
-            <a:off x="1691640" y="1783080"/>
-            <a:ext cx="10180015" cy="4663440"/>
+            <a:off x="5349240" y="1783080"/>
+            <a:ext cx="6522415" cy="4663440"/>
           </a:xfrm>
           <a:prstGeom prst="rect">
             <a:avLst/>
@@ -14252,43 +14252,6 @@
                 <a:cs typeface="Times New Roman" pitchFamily="34" charset="-120"/>
               </a:rPr>
               <a:t>It is the rate at which air temperature falls with height, on average 6.5 °C per 1,000 m.</a:t>
-            </a:r>
-            <a:endParaRPr lang="en-US" sz="4000" dirty="0"/>
-          </a:p>
-          <a:p>
-            <a:pPr algn="l" indent="0" marL="0">
-              <a:spcAft>
-                <a:spcPts val="800"/>
-              </a:spcAft>
-              <a:buNone/>
-            </a:pPr>
-            <a:r>
-              <a:rPr lang="en-US" sz="4000" b="1" dirty="0">
-                <a:solidFill>
-                  <a:srgbClr val="111111"/>
-                </a:solidFill>
-                <a:latin typeface="Times New Roman" pitchFamily="34" charset="0"/>
-                <a:ea typeface="Times New Roman" pitchFamily="34" charset="-122"/>
-                <a:cs typeface="Times New Roman" pitchFamily="34" charset="-120"/>
-              </a:rPr>
-              <a:t>Terrestrial radiation: </a:t>
-            </a:r>
-            <a:pPr algn="l" indent="0" marL="0">
-              <a:spcAft>
-                <a:spcPts val="800"/>
-              </a:spcAft>
-              <a:buNone/>
-            </a:pPr>
-            <a:r>
-              <a:rPr lang="en-US" sz="4000" dirty="0">
-                <a:solidFill>
-                  <a:srgbClr val="111111"/>
-                </a:solidFill>
-                <a:latin typeface="Times New Roman" pitchFamily="34" charset="0"/>
-                <a:ea typeface="Times New Roman" pitchFamily="34" charset="-122"/>
-                <a:cs typeface="Times New Roman" pitchFamily="34" charset="-120"/>
-              </a:rPr>
-              <a:t>It is the long-wave heat given off by the surface of the Earth.</a:t>
             </a:r>
             <a:endParaRPr lang="en-US" sz="4000" dirty="0"/>
           </a:p>
@@ -14423,7 +14386,7 @@
         <p:spPr>
           <a:xfrm>
             <a:off x="0" y="658368"/>
-            <a:ext cx="5120640" cy="5833872"/>
+            <a:ext cx="2468880" cy="5833872"/>
           </a:xfrm>
           <a:prstGeom prst="rect">
             <a:avLst/>
@@ -14438,8 +14401,8 @@
         </p:nvSpPr>
         <p:spPr>
           <a:xfrm>
-            <a:off x="5349240" y="1005840"/>
-            <a:ext cx="6522415" cy="731520"/>
+            <a:off x="2697480" y="1005840"/>
+            <a:ext cx="9174175" cy="731520"/>
           </a:xfrm>
           <a:prstGeom prst="rect">
             <a:avLst/>
@@ -14479,8 +14442,8 @@
         </p:nvSpPr>
         <p:spPr>
           <a:xfrm>
-            <a:off x="5349240" y="1783080"/>
-            <a:ext cx="6522415" cy="4663440"/>
+            <a:off x="2697480" y="1783080"/>
+            <a:ext cx="9174175" cy="4663440"/>
           </a:xfrm>
           <a:prstGeom prst="rect">
             <a:avLst/>
@@ -14507,7 +14470,7 @@
                 <a:ea typeface="Times New Roman" pitchFamily="34" charset="-122"/>
                 <a:cs typeface="Times New Roman" pitchFamily="34" charset="-120"/>
               </a:rPr>
-              <a:t>Air density: </a:t>
+              <a:t>Adiabatic change: </a:t>
             </a:r>
             <a:pPr algn="l" indent="0" marL="0">
               <a:spcAft>
@@ -14524,7 +14487,44 @@
                 <a:ea typeface="Times New Roman" pitchFamily="34" charset="-122"/>
                 <a:cs typeface="Times New Roman" pitchFamily="34" charset="-120"/>
               </a:rPr>
-              <a:t>It is the amount of air (mass) in a given volume.</a:t>
+              <a:t>It is a change of temperature of rising or sinking air caused by expansion or compression, without heat being added or removed.</a:t>
+            </a:r>
+            <a:endParaRPr lang="en-US" sz="4000" dirty="0"/>
+          </a:p>
+          <a:p>
+            <a:pPr algn="l" indent="0" marL="0">
+              <a:spcAft>
+                <a:spcPts val="800"/>
+              </a:spcAft>
+              <a:buNone/>
+            </a:pPr>
+            <a:r>
+              <a:rPr lang="en-US" sz="4000" b="1" dirty="0">
+                <a:solidFill>
+                  <a:srgbClr val="111111"/>
+                </a:solidFill>
+                <a:latin typeface="Times New Roman" pitchFamily="34" charset="0"/>
+                <a:ea typeface="Times New Roman" pitchFamily="34" charset="-122"/>
+                <a:cs typeface="Times New Roman" pitchFamily="34" charset="-120"/>
+              </a:rPr>
+              <a:t>Terrestrial radiation: </a:t>
+            </a:r>
+            <a:pPr algn="l" indent="0" marL="0">
+              <a:spcAft>
+                <a:spcPts val="800"/>
+              </a:spcAft>
+              <a:buNone/>
+            </a:pPr>
+            <a:r>
+              <a:rPr lang="en-US" sz="4000" dirty="0">
+                <a:solidFill>
+                  <a:srgbClr val="111111"/>
+                </a:solidFill>
+                <a:latin typeface="Times New Roman" pitchFamily="34" charset="0"/>
+                <a:ea typeface="Times New Roman" pitchFamily="34" charset="-122"/>
+                <a:cs typeface="Times New Roman" pitchFamily="34" charset="-120"/>
+              </a:rPr>
+              <a:t>It is the long-wave heat given off by the surface of the Earth.</a:t>
             </a:r>
             <a:endParaRPr lang="en-US" sz="4000" dirty="0"/>
           </a:p>
@@ -14677,7 +14677,7 @@
                 <a:ea typeface="Times New Roman" pitchFamily="34" charset="-122"/>
                 <a:cs typeface="Times New Roman" pitchFamily="34" charset="-120"/>
               </a:rPr>
-              <a:t>1. The Vertical Variation of Temperature</a:t>
+              <a:t>1. Nature of the Variation of Temperature with Height</a:t>
             </a:r>
             <a:endParaRPr lang="en-US" sz="3600" dirty="0"/>
           </a:p>
@@ -14692,7 +14692,7 @@
         <p:spPr>
           <a:xfrm>
             <a:off x="365760" y="1783080"/>
-            <a:ext cx="4846320" cy="4617720"/>
+            <a:ext cx="6035040" cy="4617720"/>
           </a:xfrm>
           <a:prstGeom prst="rect">
             <a:avLst/>
@@ -14711,7 +14711,7 @@
               <a:buNone/>
             </a:pPr>
             <a:r>
-              <a:rPr lang="en-US" sz="3600" i="1" dirty="0">
+              <a:rPr lang="en-US" sz="3000" i="1" dirty="0">
                 <a:solidFill>
                   <a:srgbClr val="111111"/>
                 </a:solidFill>
@@ -14719,9 +14719,9 @@
                 <a:ea typeface="Times New Roman" pitchFamily="34" charset="-122"/>
                 <a:cs typeface="Times New Roman" pitchFamily="34" charset="-120"/>
               </a:rPr>
-              <a:t>Temperature varies with height as follows:</a:t>
-            </a:r>
-            <a:endParaRPr lang="en-US" sz="3600" dirty="0"/>
+              <a:t>Temperature varies with height in the following way:</a:t>
+            </a:r>
+            <a:endParaRPr lang="en-US" sz="3000" dirty="0"/>
           </a:p>
           <a:p>
             <a:pPr algn="l" indent="0" marL="0">
@@ -14731,7 +14731,7 @@
               <a:buNone/>
             </a:pPr>
             <a:r>
-              <a:rPr lang="en-US" sz="3600" b="1" dirty="0">
+              <a:rPr lang="en-US" sz="3000" b="1" dirty="0">
                 <a:solidFill>
                   <a:srgbClr val="111111"/>
                 </a:solidFill>
@@ -14748,7 +14748,7 @@
               <a:buNone/>
             </a:pPr>
             <a:r>
-              <a:rPr lang="en-US" sz="3600" dirty="0">
+              <a:rPr lang="en-US" sz="3000" dirty="0">
                 <a:solidFill>
                   <a:srgbClr val="111111"/>
                 </a:solidFill>
@@ -14756,9 +14756,9 @@
                 <a:ea typeface="Times New Roman" pitchFamily="34" charset="-122"/>
                 <a:cs typeface="Times New Roman" pitchFamily="34" charset="-120"/>
               </a:rPr>
-              <a:t>In the troposphere, temperature falls as altitude increases.</a:t>
-            </a:r>
-            <a:endParaRPr lang="en-US" sz="3600" dirty="0"/>
+              <a:t>In the troposphere, temperature falls as altitude increases, on average by 6.5 °C for every 1,000 m. This fall is called the environmental lapse rate, but it changes with the time of day, the season and the place.</a:t>
+            </a:r>
+            <a:endParaRPr lang="en-US" sz="3000" dirty="0"/>
           </a:p>
         </p:txBody>
       </p:sp>
@@ -14778,8 +14778,8 @@
         </p:blipFill>
         <p:spPr>
           <a:xfrm>
-            <a:off x="5349240" y="2617506"/>
-            <a:ext cx="6659575" cy="2601397"/>
+            <a:off x="6537960" y="2849678"/>
+            <a:ext cx="5470855" cy="2137053"/>
           </a:xfrm>
           <a:prstGeom prst="rect">
             <a:avLst/>
@@ -14794,8 +14794,8 @@
         </p:nvSpPr>
         <p:spPr>
           <a:xfrm>
-            <a:off x="5349240" y="6089904"/>
-            <a:ext cx="6659575" cy="347472"/>
+            <a:off x="6537960" y="6089904"/>
+            <a:ext cx="5470855" cy="347472"/>
           </a:xfrm>
           <a:prstGeom prst="rect">
             <a:avLst/>
@@ -14819,7 +14819,7 @@
                 <a:ea typeface="Times New Roman" pitchFamily="34" charset="-122"/>
                 <a:cs typeface="Times New Roman" pitchFamily="34" charset="-120"/>
               </a:rPr>
-              <a:t>Illustration: temperature and height</a:t>
+              <a:t>Illustration: the fall of temperature with height</a:t>
             </a:r>
             <a:endParaRPr lang="en-US" sz="1600" dirty="0"/>
           </a:p>
@@ -14954,7 +14954,7 @@
         <p:spPr>
           <a:xfrm>
             <a:off x="0" y="658368"/>
-            <a:ext cx="5120640" cy="5833872"/>
+            <a:ext cx="3840480" cy="5833872"/>
           </a:xfrm>
           <a:prstGeom prst="rect">
             <a:avLst/>
@@ -14969,8 +14969,8 @@
         </p:nvSpPr>
         <p:spPr>
           <a:xfrm>
-            <a:off x="5349240" y="1005840"/>
-            <a:ext cx="6522415" cy="731520"/>
+            <a:off x="4069080" y="1005840"/>
+            <a:ext cx="7802575" cy="731520"/>
           </a:xfrm>
           <a:prstGeom prst="rect">
             <a:avLst/>
@@ -14996,7 +14996,7 @@
                 <a:ea typeface="Times New Roman" pitchFamily="34" charset="-122"/>
                 <a:cs typeface="Times New Roman" pitchFamily="34" charset="-120"/>
               </a:rPr>
-              <a:t>1. The Vertical Variation of Temperature</a:t>
+              <a:t>1. Nature of the Variation of Temperature with Height</a:t>
             </a:r>
             <a:endParaRPr lang="en-US" sz="3600" dirty="0"/>
           </a:p>
@@ -15010,8 +15010,8 @@
         </p:nvSpPr>
         <p:spPr>
           <a:xfrm>
-            <a:off x="5349240" y="1783080"/>
-            <a:ext cx="6522415" cy="4663440"/>
+            <a:off x="4069080" y="1783080"/>
+            <a:ext cx="7802575" cy="4663440"/>
           </a:xfrm>
           <a:prstGeom prst="rect">
             <a:avLst/>
@@ -15038,7 +15038,7 @@
                 <a:ea typeface="Times New Roman" pitchFamily="34" charset="-122"/>
                 <a:cs typeface="Times New Roman" pitchFamily="34" charset="-120"/>
               </a:rPr>
-              <a:t>Average rate: </a:t>
+              <a:t>Worked example: </a:t>
             </a:r>
             <a:pPr algn="l" indent="0" marL="0">
               <a:spcAft>
@@ -15055,44 +15055,7 @@
                 <a:ea typeface="Times New Roman" pitchFamily="34" charset="-122"/>
                 <a:cs typeface="Times New Roman" pitchFamily="34" charset="-120"/>
               </a:rPr>
-              <a:t>The fall is about 6.5 °C for every 1,000 m.</a:t>
-            </a:r>
-            <a:endParaRPr lang="en-US" sz="4000" dirty="0"/>
-          </a:p>
-          <a:p>
-            <a:pPr algn="l" indent="0" marL="0">
-              <a:spcAft>
-                <a:spcPts val="800"/>
-              </a:spcAft>
-              <a:buNone/>
-            </a:pPr>
-            <a:r>
-              <a:rPr lang="en-US" sz="4000" b="1" dirty="0">
-                <a:solidFill>
-                  <a:srgbClr val="111111"/>
-                </a:solidFill>
-                <a:latin typeface="Times New Roman" pitchFamily="34" charset="0"/>
-                <a:ea typeface="Times New Roman" pitchFamily="34" charset="-122"/>
-                <a:cs typeface="Times New Roman" pitchFamily="34" charset="-120"/>
-              </a:rPr>
-              <a:t>Worked example: </a:t>
-            </a:r>
-            <a:pPr algn="l" indent="0" marL="0">
-              <a:spcAft>
-                <a:spcPts val="800"/>
-              </a:spcAft>
-              <a:buNone/>
-            </a:pPr>
-            <a:r>
-              <a:rPr lang="en-US" sz="4000" dirty="0">
-                <a:solidFill>
-                  <a:srgbClr val="111111"/>
-                </a:solidFill>
-                <a:latin typeface="Times New Roman" pitchFamily="34" charset="0"/>
-                <a:ea typeface="Times New Roman" pitchFamily="34" charset="-122"/>
-                <a:cs typeface="Times New Roman" pitchFamily="34" charset="-120"/>
-              </a:rPr>
-              <a:t>At 35 °C in Garoua (about 200 m), a place at 1,200 m would be at about 35 − 6.5 = 28.5 °C.</a:t>
+              <a:t>If it is 35 °C in Garoua (about 200 m), a place 1,000 m higher, at 1,200 m, would be at about 35 − 6.5 = 28.5 °C. The same calculation shows why highland towns are cooler than lowland towns.</a:t>
             </a:r>
             <a:endParaRPr lang="en-US" sz="4000" dirty="0"/>
           </a:p>
@@ -15484,7 +15447,7 @@
                 <a:ea typeface="Times New Roman" pitchFamily="34" charset="-122"/>
                 <a:cs typeface="Times New Roman" pitchFamily="34" charset="-120"/>
               </a:rPr>
-              <a:t>1. The Vertical Variation of Temperature</a:t>
+              <a:t>1. Nature of the Variation of Temperature with Height</a:t>
             </a:r>
             <a:endParaRPr lang="en-US" sz="3600" dirty="0"/>
           </a:p>
@@ -15499,7 +15462,7 @@
         <p:spPr>
           <a:xfrm>
             <a:off x="365760" y="1783080"/>
-            <a:ext cx="4846320" cy="4617720"/>
+            <a:ext cx="6035040" cy="4617720"/>
           </a:xfrm>
           <a:prstGeom prst="rect">
             <a:avLst/>
@@ -15543,7 +15506,7 @@
                 <a:ea typeface="Times New Roman" pitchFamily="34" charset="-122"/>
                 <a:cs typeface="Times New Roman" pitchFamily="34" charset="-120"/>
               </a:rPr>
-              <a:t>The summit of Mount Cameroon (4,095 m) is about 25 °C cooler than the coast and can have frost.</a:t>
+              <a:t>The summit of Mount Cameroon (4,095 m) is about 25 °C cooler than the coast at Limbe, and it can have frost. Kilimanjaro, close to the Equator, even has permanent snow.</a:t>
             </a:r>
             <a:endParaRPr lang="en-US" sz="3600" dirty="0"/>
           </a:p>
@@ -15565,8 +15528,8 @@
         </p:blipFill>
         <p:spPr>
           <a:xfrm>
-            <a:off x="5349240" y="2071212"/>
-            <a:ext cx="6659575" cy="3693983"/>
+            <a:off x="6537960" y="2400897"/>
+            <a:ext cx="5470855" cy="3034615"/>
           </a:xfrm>
           <a:prstGeom prst="rect">
             <a:avLst/>
@@ -15581,8 +15544,8 @@
         </p:nvSpPr>
         <p:spPr>
           <a:xfrm>
-            <a:off x="5349240" y="6089904"/>
-            <a:ext cx="6659575" cy="347472"/>
+            <a:off x="6537960" y="6089904"/>
+            <a:ext cx="5470855" cy="347472"/>
           </a:xfrm>
           <a:prstGeom prst="rect">
             <a:avLst/>
@@ -15759,7 +15722,7 @@
                 <a:ea typeface="Times New Roman" pitchFamily="34" charset="-122"/>
                 <a:cs typeface="Times New Roman" pitchFamily="34" charset="-120"/>
               </a:rPr>
-              <a:t>2. Reasons for the Fall of Temperature with Height</a:t>
+              <a:t>2. Reasons for the Vertical Lapsing of Temperature</a:t>
             </a:r>
             <a:endParaRPr lang="en-US" sz="3600" dirty="0"/>
           </a:p>
@@ -15774,7 +15737,7 @@
         <p:spPr>
           <a:xfrm>
             <a:off x="365760" y="1783080"/>
-            <a:ext cx="4846320" cy="4617720"/>
+            <a:ext cx="6035040" cy="4617720"/>
           </a:xfrm>
           <a:prstGeom prst="rect">
             <a:avLst/>
@@ -15793,7 +15756,7 @@
               <a:buNone/>
             </a:pPr>
             <a:r>
-              <a:rPr lang="en-US" sz="3000" i="1" dirty="0">
+              <a:rPr lang="en-US" sz="3200" i="1" dirty="0">
                 <a:solidFill>
                   <a:srgbClr val="111111"/>
                 </a:solidFill>
@@ -15803,7 +15766,7 @@
               </a:rPr>
               <a:t>Temperature falls with height for the following reasons:</a:t>
             </a:r>
-            <a:endParaRPr lang="en-US" sz="3000" dirty="0"/>
+            <a:endParaRPr lang="en-US" sz="3200" dirty="0"/>
           </a:p>
           <a:p>
             <a:pPr algn="l" indent="0" marL="0">
@@ -15813,7 +15776,7 @@
               <a:buNone/>
             </a:pPr>
             <a:r>
-              <a:rPr lang="en-US" sz="3000" b="1" dirty="0">
+              <a:rPr lang="en-US" sz="3200" b="1" dirty="0">
                 <a:solidFill>
                   <a:srgbClr val="111111"/>
                 </a:solidFill>
@@ -15830,7 +15793,7 @@
               <a:buNone/>
             </a:pPr>
             <a:r>
-              <a:rPr lang="en-US" sz="3000" dirty="0">
+              <a:rPr lang="en-US" sz="3200" dirty="0">
                 <a:solidFill>
                   <a:srgbClr val="111111"/>
                 </a:solidFill>
@@ -15838,9 +15801,9 @@
                 <a:ea typeface="Times New Roman" pitchFamily="34" charset="-122"/>
                 <a:cs typeface="Times New Roman" pitchFamily="34" charset="-120"/>
               </a:rPr>
-              <a:t>Sunlight passes through the air and heats the ground, which warms the air above it, so the air is warmest near the ground.</a:t>
-            </a:r>
-            <a:endParaRPr lang="en-US" sz="3000" dirty="0"/>
+              <a:t>Sunlight passes through the air and heats the ground, which then gives off heat to the air above it. The air is therefore warmest near the ground and cooler as we move away from it.</a:t>
+            </a:r>
+            <a:endParaRPr lang="en-US" sz="3200" dirty="0"/>
           </a:p>
         </p:txBody>
       </p:sp>
@@ -15860,8 +15823,8 @@
         </p:blipFill>
         <p:spPr>
           <a:xfrm>
-            <a:off x="5349240" y="2617506"/>
-            <a:ext cx="6659575" cy="2601397"/>
+            <a:off x="6537960" y="2849678"/>
+            <a:ext cx="5470855" cy="2137053"/>
           </a:xfrm>
           <a:prstGeom prst="rect">
             <a:avLst/>
@@ -15876,8 +15839,8 @@
         </p:nvSpPr>
         <p:spPr>
           <a:xfrm>
-            <a:off x="5349240" y="6089904"/>
-            <a:ext cx="6659575" cy="347472"/>
+            <a:off x="6537960" y="6089904"/>
+            <a:ext cx="5470855" cy="347472"/>
           </a:xfrm>
           <a:prstGeom prst="rect">
             <a:avLst/>
@@ -15901,7 +15864,7 @@
                 <a:ea typeface="Times New Roman" pitchFamily="34" charset="-122"/>
                 <a:cs typeface="Times New Roman" pitchFamily="34" charset="-120"/>
               </a:rPr>
-              <a:t>Illustration: heating from below</a:t>
+              <a:t>Illustration: the air heated from below</a:t>
             </a:r>
             <a:endParaRPr lang="en-US" sz="1600" dirty="0"/>
           </a:p>
@@ -16054,7 +16017,7 @@
                 <a:ea typeface="Times New Roman" pitchFamily="34" charset="-122"/>
                 <a:cs typeface="Times New Roman" pitchFamily="34" charset="-120"/>
               </a:rPr>
-              <a:t>2. Reasons for the Fall of Temperature with Height</a:t>
+              <a:t>2. Reasons for the Vertical Lapsing of Temperature</a:t>
             </a:r>
             <a:endParaRPr lang="en-US" sz="3600" dirty="0"/>
           </a:p>
@@ -16069,7 +16032,7 @@
         <p:spPr>
           <a:xfrm>
             <a:off x="365760" y="1783080"/>
-            <a:ext cx="4846320" cy="4617720"/>
+            <a:ext cx="6035040" cy="4617720"/>
           </a:xfrm>
           <a:prstGeom prst="rect">
             <a:avLst/>
@@ -16096,7 +16059,7 @@
                 <a:ea typeface="Times New Roman" pitchFamily="34" charset="-122"/>
                 <a:cs typeface="Times New Roman" pitchFamily="34" charset="-120"/>
               </a:rPr>
-              <a:t>Denser air below: </a:t>
+              <a:t>Denser air near the ground: </a:t>
             </a:r>
             <a:pPr algn="l" indent="0" marL="0">
               <a:spcAft>
@@ -16113,7 +16076,7 @@
                 <a:ea typeface="Times New Roman" pitchFamily="34" charset="-122"/>
                 <a:cs typeface="Times New Roman" pitchFamily="34" charset="-120"/>
               </a:rPr>
-              <a:t>Gravity keeps most gases, dust and water vapour near the ground, and they absorb and keep heat.</a:t>
+              <a:t>Gravity keeps most of the gases, water vapour and dust near the ground. These absorb and keep terrestrial radiation, so the lower air holds more heat.</a:t>
             </a:r>
             <a:endParaRPr lang="en-US" sz="3600" dirty="0"/>
           </a:p>
@@ -16135,8 +16098,8 @@
         </p:blipFill>
         <p:spPr>
           <a:xfrm>
-            <a:off x="5349240" y="2617506"/>
-            <a:ext cx="6659575" cy="2601397"/>
+            <a:off x="6537960" y="2849678"/>
+            <a:ext cx="5470855" cy="2137053"/>
           </a:xfrm>
           <a:prstGeom prst="rect">
             <a:avLst/>
@@ -16151,8 +16114,8 @@
         </p:nvSpPr>
         <p:spPr>
           <a:xfrm>
-            <a:off x="5349240" y="6089904"/>
-            <a:ext cx="6659575" cy="347472"/>
+            <a:off x="6537960" y="6089904"/>
+            <a:ext cx="5470855" cy="347472"/>
           </a:xfrm>
           <a:prstGeom prst="rect">
             <a:avLst/>
@@ -16176,7 +16139,7 @@
                 <a:ea typeface="Times New Roman" pitchFamily="34" charset="-122"/>
                 <a:cs typeface="Times New Roman" pitchFamily="34" charset="-120"/>
               </a:rPr>
-              <a:t>Illustration: why temperature falls with height</a:t>
+              <a:t>Illustration: density and temperature</a:t>
             </a:r>
             <a:endParaRPr lang="en-US" sz="1600" dirty="0"/>
           </a:p>
@@ -16353,7 +16316,7 @@
                 <a:ea typeface="Times New Roman" pitchFamily="34" charset="-122"/>
                 <a:cs typeface="Times New Roman" pitchFamily="34" charset="-120"/>
               </a:rPr>
-              <a:t>2. Reasons for the Fall of Temperature with Height</a:t>
+              <a:t>2. Reasons for the Vertical Lapsing of Temperature</a:t>
             </a:r>
             <a:endParaRPr lang="en-US" sz="3600" dirty="0"/>
           </a:p>
@@ -16395,7 +16358,7 @@
                 <a:ea typeface="Times New Roman" pitchFamily="34" charset="-122"/>
                 <a:cs typeface="Times New Roman" pitchFamily="34" charset="-120"/>
               </a:rPr>
-              <a:t>Thin air above: </a:t>
+              <a:t>Thin air at high altitudes: </a:t>
             </a:r>
             <a:pPr algn="l" indent="0" marL="0">
               <a:spcAft>
@@ -16412,7 +16375,7 @@
                 <a:ea typeface="Times New Roman" pitchFamily="34" charset="-122"/>
                 <a:cs typeface="Times New Roman" pitchFamily="34" charset="-120"/>
               </a:rPr>
-              <a:t>At high altitudes, there are fewer particles to absorb heat.</a:t>
+              <a:t>Higher up, the air contains fewer molecules and less water vapour. It can therefore absorb and keep only a little heat, even if it receives strong sunshine.</a:t>
             </a:r>
             <a:endParaRPr lang="en-US" sz="4000" dirty="0"/>
           </a:p>
@@ -16565,7 +16528,7 @@
                 <a:ea typeface="Times New Roman" pitchFamily="34" charset="-122"/>
                 <a:cs typeface="Times New Roman" pitchFamily="34" charset="-120"/>
               </a:rPr>
-              <a:t>2. Reasons for the Fall of Temperature with Height</a:t>
+              <a:t>2. Reasons for the Vertical Lapsing of Temperature</a:t>
             </a:r>
             <a:endParaRPr lang="en-US" sz="3600" dirty="0"/>
           </a:p>
@@ -16580,7 +16543,7 @@
         <p:spPr>
           <a:xfrm>
             <a:off x="365760" y="1783080"/>
-            <a:ext cx="4846320" cy="4617720"/>
+            <a:ext cx="6035040" cy="4617720"/>
           </a:xfrm>
           <a:prstGeom prst="rect">
             <a:avLst/>
@@ -16607,7 +16570,7 @@
                 <a:ea typeface="Times New Roman" pitchFamily="34" charset="-122"/>
                 <a:cs typeface="Times New Roman" pitchFamily="34" charset="-120"/>
               </a:rPr>
-              <a:t>Pressure and expansion: </a:t>
+              <a:t>Adiabatic cooling: </a:t>
             </a:r>
             <a:pPr algn="l" indent="0" marL="0">
               <a:spcAft>
@@ -16624,7 +16587,7 @@
                 <a:ea typeface="Times New Roman" pitchFamily="34" charset="-122"/>
                 <a:cs typeface="Times New Roman" pitchFamily="34" charset="-120"/>
               </a:rPr>
-              <a:t>Rising air meets lower pressure, expands and cools.</a:t>
+              <a:t>When air rises, it meets lower pressure, expands and cools, without losing heat to its surroundings. This adiabatic cooling makes rising air colder with height.</a:t>
             </a:r>
             <a:endParaRPr lang="en-US" sz="3600" dirty="0"/>
           </a:p>
@@ -16646,8 +16609,8 @@
         </p:blipFill>
         <p:spPr>
           <a:xfrm>
-            <a:off x="5349240" y="2617506"/>
-            <a:ext cx="6659575" cy="2601397"/>
+            <a:off x="6537960" y="2849678"/>
+            <a:ext cx="5470855" cy="2137053"/>
           </a:xfrm>
           <a:prstGeom prst="rect">
             <a:avLst/>
@@ -16662,8 +16625,8 @@
         </p:nvSpPr>
         <p:spPr>
           <a:xfrm>
-            <a:off x="5349240" y="6089904"/>
-            <a:ext cx="6659575" cy="347472"/>
+            <a:off x="6537960" y="6089904"/>
+            <a:ext cx="5470855" cy="347472"/>
           </a:xfrm>
           <a:prstGeom prst="rect">
             <a:avLst/>
@@ -16687,7 +16650,7 @@
                 <a:ea typeface="Times New Roman" pitchFamily="34" charset="-122"/>
                 <a:cs typeface="Times New Roman" pitchFamily="34" charset="-120"/>
               </a:rPr>
-              <a:t>Illustration: rising air cools</a:t>
+              <a:t>Illustration: a rising parcel of air</a:t>
             </a:r>
             <a:endParaRPr lang="en-US" sz="1600" dirty="0"/>
           </a:p>
@@ -20674,7 +20637,7 @@
                           <a:ea typeface="Calibri" pitchFamily="34" charset="-122"/>
                           <a:cs typeface="Calibri" pitchFamily="34" charset="-120"/>
                         </a:rPr>
-                        <a:t>DEFINITIONS; The Vertical Variation of Temperature; Reasons for the Fall of Temperature with Height.</a:t>
+                        <a:t>DEFINITIONS; Nature of the Variation of Temperature with Height; Reasons for the Vertical Lapsing of Temperature.</a:t>
                       </a:r>
                       <a:endParaRPr lang="en-US" sz="1600" dirty="0">
                         <a:latin typeface="Calibri" charset="0"/>
